--- a/day2-deck/decks/Gross Change by Percent - Option A.pptx
+++ b/day2-deck/decks/Gross Change by Percent - Option A.pptx
@@ -1607,7 +1607,7 @@
               <a:buNone/>
             </a:pPr>
             <a:r>
-              <a:rPr lang="en-US" sz="1200" dirty="0">
+              <a:rPr lang="en-US" sz="1200" b="1" dirty="0">
                 <a:solidFill>
                   <a:srgbClr val="0B7A4A"/>
                 </a:solidFill>
@@ -1783,7 +1783,7 @@
               <a:buNone/>
             </a:pPr>
             <a:r>
-              <a:rPr lang="en-US" sz="1200" dirty="0">
+              <a:rPr lang="en-US" sz="1200" b="1" dirty="0">
                 <a:solidFill>
                   <a:srgbClr val="0B7A4A"/>
                 </a:solidFill>
@@ -1959,7 +1959,7 @@
               <a:buNone/>
             </a:pPr>
             <a:r>
-              <a:rPr lang="en-US" sz="1200" dirty="0">
+              <a:rPr lang="en-US" sz="1200" b="1" dirty="0">
                 <a:solidFill>
                   <a:srgbClr val="0B7A4A"/>
                 </a:solidFill>
@@ -2135,7 +2135,7 @@
               <a:buNone/>
             </a:pPr>
             <a:r>
-              <a:rPr lang="en-US" sz="1200" dirty="0">
+              <a:rPr lang="en-US" sz="1200" b="1" dirty="0">
                 <a:solidFill>
                   <a:srgbClr val="0B7A4A"/>
                 </a:solidFill>
@@ -2311,7 +2311,7 @@
               <a:buNone/>
             </a:pPr>
             <a:r>
-              <a:rPr lang="en-US" sz="1200" dirty="0">
+              <a:rPr lang="en-US" sz="1200" b="1" dirty="0">
                 <a:solidFill>
                   <a:srgbClr val="0B7A4A"/>
                 </a:solidFill>
@@ -2487,7 +2487,7 @@
               <a:buNone/>
             </a:pPr>
             <a:r>
-              <a:rPr lang="en-US" sz="1200" dirty="0">
+              <a:rPr lang="en-US" sz="1200" b="1" dirty="0">
                 <a:solidFill>
                   <a:srgbClr val="0B7A4A"/>
                 </a:solidFill>
@@ -2663,7 +2663,7 @@
               <a:buNone/>
             </a:pPr>
             <a:r>
-              <a:rPr lang="en-US" sz="1200" dirty="0">
+              <a:rPr lang="en-US" sz="1200" b="1" dirty="0">
                 <a:solidFill>
                   <a:srgbClr val="0B7A4A"/>
                 </a:solidFill>
@@ -2839,7 +2839,7 @@
               <a:buNone/>
             </a:pPr>
             <a:r>
-              <a:rPr lang="en-US" sz="1200" dirty="0">
+              <a:rPr lang="en-US" sz="1200" b="1" dirty="0">
                 <a:solidFill>
                   <a:srgbClr val="0B7A4A"/>
                 </a:solidFill>
@@ -3015,7 +3015,7 @@
               <a:buNone/>
             </a:pPr>
             <a:r>
-              <a:rPr lang="en-US" sz="1200" dirty="0">
+              <a:rPr lang="en-US" sz="1200" b="1" dirty="0">
                 <a:solidFill>
                   <a:srgbClr val="0B7A4A"/>
                 </a:solidFill>
@@ -3191,7 +3191,7 @@
               <a:buNone/>
             </a:pPr>
             <a:r>
-              <a:rPr lang="en-US" sz="1200" dirty="0">
+              <a:rPr lang="en-US" sz="1200" b="1" dirty="0">
                 <a:solidFill>
                   <a:srgbClr val="0B7A4A"/>
                 </a:solidFill>
@@ -3367,7 +3367,7 @@
               <a:buNone/>
             </a:pPr>
             <a:r>
-              <a:rPr lang="en-US" sz="1200" dirty="0">
+              <a:rPr lang="en-US" sz="1200" b="1" dirty="0">
                 <a:solidFill>
                   <a:srgbClr val="0B7A4A"/>
                 </a:solidFill>
@@ -3543,7 +3543,7 @@
               <a:buNone/>
             </a:pPr>
             <a:r>
-              <a:rPr lang="en-US" sz="1200" dirty="0">
+              <a:rPr lang="en-US" sz="1200" b="1" dirty="0">
                 <a:solidFill>
                   <a:srgbClr val="0B7A4A"/>
                 </a:solidFill>
@@ -3719,7 +3719,7 @@
               <a:buNone/>
             </a:pPr>
             <a:r>
-              <a:rPr lang="en-US" sz="1200" dirty="0">
+              <a:rPr lang="en-US" sz="1200" b="1" dirty="0">
                 <a:solidFill>
                   <a:srgbClr val="0B7A4A"/>
                 </a:solidFill>
@@ -3895,7 +3895,7 @@
               <a:buNone/>
             </a:pPr>
             <a:r>
-              <a:rPr lang="en-US" sz="1200" dirty="0">
+              <a:rPr lang="en-US" sz="1200" b="1" dirty="0">
                 <a:solidFill>
                   <a:srgbClr val="0B7A4A"/>
                 </a:solidFill>
@@ -4071,7 +4071,7 @@
               <a:buNone/>
             </a:pPr>
             <a:r>
-              <a:rPr lang="en-US" sz="1200" dirty="0">
+              <a:rPr lang="en-US" sz="1200" b="1" dirty="0">
                 <a:solidFill>
                   <a:srgbClr val="0B7A4A"/>
                 </a:solidFill>
@@ -4247,7 +4247,7 @@
               <a:buNone/>
             </a:pPr>
             <a:r>
-              <a:rPr lang="en-US" sz="1200" dirty="0">
+              <a:rPr lang="en-US" sz="1200" b="1" dirty="0">
                 <a:solidFill>
                   <a:srgbClr val="0B7A4A"/>
                 </a:solidFill>
@@ -4423,7 +4423,7 @@
               <a:buNone/>
             </a:pPr>
             <a:r>
-              <a:rPr lang="en-US" sz="1200" dirty="0">
+              <a:rPr lang="en-US" sz="1200" b="1" dirty="0">
                 <a:solidFill>
                   <a:srgbClr val="0B7A4A"/>
                 </a:solidFill>
@@ -4599,7 +4599,7 @@
               <a:buNone/>
             </a:pPr>
             <a:r>
-              <a:rPr lang="en-US" sz="1200" dirty="0">
+              <a:rPr lang="en-US" sz="1200" b="1" dirty="0">
                 <a:solidFill>
                   <a:srgbClr val="0B7A4A"/>
                 </a:solidFill>
@@ -4775,7 +4775,7 @@
               <a:buNone/>
             </a:pPr>
             <a:r>
-              <a:rPr lang="en-US" sz="1200" dirty="0">
+              <a:rPr lang="en-US" sz="1200" b="1" dirty="0">
                 <a:solidFill>
                   <a:srgbClr val="0B7A4A"/>
                 </a:solidFill>
@@ -4951,7 +4951,7 @@
               <a:buNone/>
             </a:pPr>
             <a:r>
-              <a:rPr lang="en-US" sz="1200" dirty="0">
+              <a:rPr lang="en-US" sz="1200" b="1" dirty="0">
                 <a:solidFill>
                   <a:srgbClr val="0B7A4A"/>
                 </a:solidFill>
@@ -5127,7 +5127,7 @@
               <a:buNone/>
             </a:pPr>
             <a:r>
-              <a:rPr lang="en-US" sz="1200" dirty="0">
+              <a:rPr lang="en-US" sz="1200" b="1" dirty="0">
                 <a:solidFill>
                   <a:srgbClr val="0B7A4A"/>
                 </a:solidFill>
@@ -5303,7 +5303,7 @@
               <a:buNone/>
             </a:pPr>
             <a:r>
-              <a:rPr lang="en-US" sz="1200" dirty="0">
+              <a:rPr lang="en-US" sz="1200" b="1" dirty="0">
                 <a:solidFill>
                   <a:srgbClr val="0B7A4A"/>
                 </a:solidFill>
@@ -5479,7 +5479,7 @@
               <a:buNone/>
             </a:pPr>
             <a:r>
-              <a:rPr lang="en-US" sz="1200" dirty="0">
+              <a:rPr lang="en-US" sz="1200" b="1" dirty="0">
                 <a:solidFill>
                   <a:srgbClr val="0B7A4A"/>
                 </a:solidFill>
@@ -5655,7 +5655,7 @@
               <a:buNone/>
             </a:pPr>
             <a:r>
-              <a:rPr lang="en-US" sz="1200" dirty="0">
+              <a:rPr lang="en-US" sz="1200" b="1" dirty="0">
                 <a:solidFill>
                   <a:srgbClr val="0B7A4A"/>
                 </a:solidFill>
@@ -5831,7 +5831,7 @@
               <a:buNone/>
             </a:pPr>
             <a:r>
-              <a:rPr lang="en-US" sz="1200" dirty="0">
+              <a:rPr lang="en-US" sz="1200" b="1" dirty="0">
                 <a:solidFill>
                   <a:srgbClr val="0B7A4A"/>
                 </a:solidFill>
@@ -6007,7 +6007,7 @@
               <a:buNone/>
             </a:pPr>
             <a:r>
-              <a:rPr lang="en-US" sz="1200" dirty="0">
+              <a:rPr lang="en-US" sz="1200" b="1" dirty="0">
                 <a:solidFill>
                   <a:srgbClr val="A82B26"/>
                 </a:solidFill>
@@ -6183,7 +6183,7 @@
               <a:buNone/>
             </a:pPr>
             <a:r>
-              <a:rPr lang="en-US" sz="1200" dirty="0">
+              <a:rPr lang="en-US" sz="1200" b="1" dirty="0">
                 <a:solidFill>
                   <a:srgbClr val="A82B26"/>
                 </a:solidFill>
@@ -6359,7 +6359,7 @@
               <a:buNone/>
             </a:pPr>
             <a:r>
-              <a:rPr lang="en-US" sz="1200" dirty="0">
+              <a:rPr lang="en-US" sz="1200" b="1" dirty="0">
                 <a:solidFill>
                   <a:srgbClr val="A82B26"/>
                 </a:solidFill>
@@ -6535,7 +6535,7 @@
               <a:buNone/>
             </a:pPr>
             <a:r>
-              <a:rPr lang="en-US" sz="1200" dirty="0">
+              <a:rPr lang="en-US" sz="1200" b="1" dirty="0">
                 <a:solidFill>
                   <a:srgbClr val="A82B26"/>
                 </a:solidFill>
@@ -6711,7 +6711,7 @@
               <a:buNone/>
             </a:pPr>
             <a:r>
-              <a:rPr lang="en-US" sz="1200" dirty="0">
+              <a:rPr lang="en-US" sz="1200" b="1" dirty="0">
                 <a:solidFill>
                   <a:srgbClr val="A82B26"/>
                 </a:solidFill>
@@ -6887,7 +6887,7 @@
               <a:buNone/>
             </a:pPr>
             <a:r>
-              <a:rPr lang="en-US" sz="1200" dirty="0">
+              <a:rPr lang="en-US" sz="1200" b="1" dirty="0">
                 <a:solidFill>
                   <a:srgbClr val="A82B26"/>
                 </a:solidFill>
@@ -7063,7 +7063,7 @@
               <a:buNone/>
             </a:pPr>
             <a:r>
-              <a:rPr lang="en-US" sz="1200" dirty="0">
+              <a:rPr lang="en-US" sz="1200" b="1" dirty="0">
                 <a:solidFill>
                   <a:srgbClr val="A82B26"/>
                 </a:solidFill>
@@ -7239,7 +7239,7 @@
               <a:buNone/>
             </a:pPr>
             <a:r>
-              <a:rPr lang="en-US" sz="1200" dirty="0">
+              <a:rPr lang="en-US" sz="1200" b="1" dirty="0">
                 <a:solidFill>
                   <a:srgbClr val="A82B26"/>
                 </a:solidFill>
@@ -7997,7 +7997,7 @@
               <a:buNone/>
             </a:pPr>
             <a:r>
-              <a:rPr lang="en-US" sz="1200" dirty="0">
+              <a:rPr lang="en-US" sz="1200" b="1" dirty="0">
                 <a:solidFill>
                   <a:srgbClr val="0B7A4A"/>
                 </a:solidFill>
@@ -8173,7 +8173,7 @@
               <a:buNone/>
             </a:pPr>
             <a:r>
-              <a:rPr lang="en-US" sz="1200" dirty="0">
+              <a:rPr lang="en-US" sz="1200" b="1" dirty="0">
                 <a:solidFill>
                   <a:srgbClr val="0B7A4A"/>
                 </a:solidFill>
@@ -8349,7 +8349,7 @@
               <a:buNone/>
             </a:pPr>
             <a:r>
-              <a:rPr lang="en-US" sz="1200" dirty="0">
+              <a:rPr lang="en-US" sz="1200" b="1" dirty="0">
                 <a:solidFill>
                   <a:srgbClr val="0B7A4A"/>
                 </a:solidFill>
@@ -8525,7 +8525,7 @@
               <a:buNone/>
             </a:pPr>
             <a:r>
-              <a:rPr lang="en-US" sz="1200" dirty="0">
+              <a:rPr lang="en-US" sz="1200" b="1" dirty="0">
                 <a:solidFill>
                   <a:srgbClr val="0B7A4A"/>
                 </a:solidFill>
@@ -8701,7 +8701,7 @@
               <a:buNone/>
             </a:pPr>
             <a:r>
-              <a:rPr lang="en-US" sz="1200" dirty="0">
+              <a:rPr lang="en-US" sz="1200" b="1" dirty="0">
                 <a:solidFill>
                   <a:srgbClr val="0B7A4A"/>
                 </a:solidFill>
@@ -8877,7 +8877,7 @@
               <a:buNone/>
             </a:pPr>
             <a:r>
-              <a:rPr lang="en-US" sz="1200" dirty="0">
+              <a:rPr lang="en-US" sz="1200" b="1" dirty="0">
                 <a:solidFill>
                   <a:srgbClr val="0B7A4A"/>
                 </a:solidFill>
@@ -9053,7 +9053,7 @@
               <a:buNone/>
             </a:pPr>
             <a:r>
-              <a:rPr lang="en-US" sz="1200" dirty="0">
+              <a:rPr lang="en-US" sz="1200" b="1" dirty="0">
                 <a:solidFill>
                   <a:srgbClr val="0B7A4A"/>
                 </a:solidFill>
@@ -9229,7 +9229,7 @@
               <a:buNone/>
             </a:pPr>
             <a:r>
-              <a:rPr lang="en-US" sz="1200" dirty="0">
+              <a:rPr lang="en-US" sz="1200" b="1" dirty="0">
                 <a:solidFill>
                   <a:srgbClr val="0B7A4A"/>
                 </a:solidFill>
@@ -9405,7 +9405,7 @@
               <a:buNone/>
             </a:pPr>
             <a:r>
-              <a:rPr lang="en-US" sz="1200" dirty="0">
+              <a:rPr lang="en-US" sz="1200" b="1" dirty="0">
                 <a:solidFill>
                   <a:srgbClr val="0B7A4A"/>
                 </a:solidFill>
@@ -9581,7 +9581,7 @@
               <a:buNone/>
             </a:pPr>
             <a:r>
-              <a:rPr lang="en-US" sz="1200" dirty="0">
+              <a:rPr lang="en-US" sz="1200" b="1" dirty="0">
                 <a:solidFill>
                   <a:srgbClr val="0B7A4A"/>
                 </a:solidFill>
@@ -9757,7 +9757,7 @@
               <a:buNone/>
             </a:pPr>
             <a:r>
-              <a:rPr lang="en-US" sz="1200" dirty="0">
+              <a:rPr lang="en-US" sz="1200" b="1" dirty="0">
                 <a:solidFill>
                   <a:srgbClr val="0B7A4A"/>
                 </a:solidFill>
@@ -9933,7 +9933,7 @@
               <a:buNone/>
             </a:pPr>
             <a:r>
-              <a:rPr lang="en-US" sz="1200" dirty="0">
+              <a:rPr lang="en-US" sz="1200" b="1" dirty="0">
                 <a:solidFill>
                   <a:srgbClr val="0B7A4A"/>
                 </a:solidFill>
@@ -10109,7 +10109,7 @@
               <a:buNone/>
             </a:pPr>
             <a:r>
-              <a:rPr lang="en-US" sz="1200" dirty="0">
+              <a:rPr lang="en-US" sz="1200" b="1" dirty="0">
                 <a:solidFill>
                   <a:srgbClr val="0B7A4A"/>
                 </a:solidFill>
@@ -10285,7 +10285,7 @@
               <a:buNone/>
             </a:pPr>
             <a:r>
-              <a:rPr lang="en-US" sz="1200" dirty="0">
+              <a:rPr lang="en-US" sz="1200" b="1" dirty="0">
                 <a:solidFill>
                   <a:srgbClr val="0B7A4A"/>
                 </a:solidFill>
@@ -10461,7 +10461,7 @@
               <a:buNone/>
             </a:pPr>
             <a:r>
-              <a:rPr lang="en-US" sz="1200" dirty="0">
+              <a:rPr lang="en-US" sz="1200" b="1" dirty="0">
                 <a:solidFill>
                   <a:srgbClr val="0B7A4A"/>
                 </a:solidFill>
@@ -10637,7 +10637,7 @@
               <a:buNone/>
             </a:pPr>
             <a:r>
-              <a:rPr lang="en-US" sz="1200" dirty="0">
+              <a:rPr lang="en-US" sz="1200" b="1" dirty="0">
                 <a:solidFill>
                   <a:srgbClr val="0B7A4A"/>
                 </a:solidFill>
@@ -10813,7 +10813,7 @@
               <a:buNone/>
             </a:pPr>
             <a:r>
-              <a:rPr lang="en-US" sz="1200" dirty="0">
+              <a:rPr lang="en-US" sz="1200" b="1" dirty="0">
                 <a:solidFill>
                   <a:srgbClr val="0B7A4A"/>
                 </a:solidFill>
@@ -10989,7 +10989,7 @@
               <a:buNone/>
             </a:pPr>
             <a:r>
-              <a:rPr lang="en-US" sz="1200" dirty="0">
+              <a:rPr lang="en-US" sz="1200" b="1" dirty="0">
                 <a:solidFill>
                   <a:srgbClr val="0B7A4A"/>
                 </a:solidFill>
@@ -11165,7 +11165,7 @@
               <a:buNone/>
             </a:pPr>
             <a:r>
-              <a:rPr lang="en-US" sz="1200" dirty="0">
+              <a:rPr lang="en-US" sz="1200" b="1" dirty="0">
                 <a:solidFill>
                   <a:srgbClr val="0B7A4A"/>
                 </a:solidFill>
@@ -11341,7 +11341,7 @@
               <a:buNone/>
             </a:pPr>
             <a:r>
-              <a:rPr lang="en-US" sz="1200" dirty="0">
+              <a:rPr lang="en-US" sz="1200" b="1" dirty="0">
                 <a:solidFill>
                   <a:srgbClr val="0B7A4A"/>
                 </a:solidFill>
@@ -11517,7 +11517,7 @@
               <a:buNone/>
             </a:pPr>
             <a:r>
-              <a:rPr lang="en-US" sz="1200" dirty="0">
+              <a:rPr lang="en-US" sz="1200" b="1" dirty="0">
                 <a:solidFill>
                   <a:srgbClr val="0B7A4A"/>
                 </a:solidFill>
@@ -11693,7 +11693,7 @@
               <a:buNone/>
             </a:pPr>
             <a:r>
-              <a:rPr lang="en-US" sz="1200" dirty="0">
+              <a:rPr lang="en-US" sz="1200" b="1" dirty="0">
                 <a:solidFill>
                   <a:srgbClr val="0B7A4A"/>
                 </a:solidFill>
@@ -11869,7 +11869,7 @@
               <a:buNone/>
             </a:pPr>
             <a:r>
-              <a:rPr lang="en-US" sz="1200" dirty="0">
+              <a:rPr lang="en-US" sz="1200" b="1" dirty="0">
                 <a:solidFill>
                   <a:srgbClr val="0B7A4A"/>
                 </a:solidFill>
@@ -12045,7 +12045,7 @@
               <a:buNone/>
             </a:pPr>
             <a:r>
-              <a:rPr lang="en-US" sz="1200" dirty="0">
+              <a:rPr lang="en-US" sz="1200" b="1" dirty="0">
                 <a:solidFill>
                   <a:srgbClr val="A82B26"/>
                 </a:solidFill>
@@ -12221,7 +12221,7 @@
               <a:buNone/>
             </a:pPr>
             <a:r>
-              <a:rPr lang="en-US" sz="1200" dirty="0">
+              <a:rPr lang="en-US" sz="1200" b="1" dirty="0">
                 <a:solidFill>
                   <a:srgbClr val="A82B26"/>
                 </a:solidFill>
@@ -12397,7 +12397,7 @@
               <a:buNone/>
             </a:pPr>
             <a:r>
-              <a:rPr lang="en-US" sz="1200" dirty="0">
+              <a:rPr lang="en-US" sz="1200" b="1" dirty="0">
                 <a:solidFill>
                   <a:srgbClr val="A82B26"/>
                 </a:solidFill>
@@ -12573,7 +12573,7 @@
               <a:buNone/>
             </a:pPr>
             <a:r>
-              <a:rPr lang="en-US" sz="1200" dirty="0">
+              <a:rPr lang="en-US" sz="1200" b="1" dirty="0">
                 <a:solidFill>
                   <a:srgbClr val="A82B26"/>
                 </a:solidFill>
@@ -12749,7 +12749,7 @@
               <a:buNone/>
             </a:pPr>
             <a:r>
-              <a:rPr lang="en-US" sz="1200" dirty="0">
+              <a:rPr lang="en-US" sz="1200" b="1" dirty="0">
                 <a:solidFill>
                   <a:srgbClr val="A82B26"/>
                 </a:solidFill>
@@ -12925,7 +12925,7 @@
               <a:buNone/>
             </a:pPr>
             <a:r>
-              <a:rPr lang="en-US" sz="1200" dirty="0">
+              <a:rPr lang="en-US" sz="1200" b="1" dirty="0">
                 <a:solidFill>
                   <a:srgbClr val="A82B26"/>
                 </a:solidFill>
@@ -13101,7 +13101,7 @@
               <a:buNone/>
             </a:pPr>
             <a:r>
-              <a:rPr lang="en-US" sz="1200" dirty="0">
+              <a:rPr lang="en-US" sz="1200" b="1" dirty="0">
                 <a:solidFill>
                   <a:srgbClr val="A82B26"/>
                 </a:solidFill>
@@ -13277,7 +13277,7 @@
               <a:buNone/>
             </a:pPr>
             <a:r>
-              <a:rPr lang="en-US" sz="1200" dirty="0">
+              <a:rPr lang="en-US" sz="1200" b="1" dirty="0">
                 <a:solidFill>
                   <a:srgbClr val="A82B26"/>
                 </a:solidFill>
@@ -13453,7 +13453,7 @@
               <a:buNone/>
             </a:pPr>
             <a:r>
-              <a:rPr lang="en-US" sz="1200" dirty="0">
+              <a:rPr lang="en-US" sz="1200" b="1" dirty="0">
                 <a:solidFill>
                   <a:srgbClr val="A82B26"/>
                 </a:solidFill>
@@ -13629,7 +13629,7 @@
               <a:buNone/>
             </a:pPr>
             <a:r>
-              <a:rPr lang="en-US" sz="1200" dirty="0">
+              <a:rPr lang="en-US" sz="1200" b="1" dirty="0">
                 <a:solidFill>
                   <a:srgbClr val="A82B26"/>
                 </a:solidFill>
@@ -14387,7 +14387,7 @@
               <a:buNone/>
             </a:pPr>
             <a:r>
-              <a:rPr lang="en-US" sz="1200" dirty="0">
+              <a:rPr lang="en-US" sz="1200" b="1" dirty="0">
                 <a:solidFill>
                   <a:srgbClr val="0B7A4A"/>
                 </a:solidFill>
@@ -14563,7 +14563,7 @@
               <a:buNone/>
             </a:pPr>
             <a:r>
-              <a:rPr lang="en-US" sz="1200" dirty="0">
+              <a:rPr lang="en-US" sz="1200" b="1" dirty="0">
                 <a:solidFill>
                   <a:srgbClr val="0B7A4A"/>
                 </a:solidFill>
@@ -14739,7 +14739,7 @@
               <a:buNone/>
             </a:pPr>
             <a:r>
-              <a:rPr lang="en-US" sz="1200" dirty="0">
+              <a:rPr lang="en-US" sz="1200" b="1" dirty="0">
                 <a:solidFill>
                   <a:srgbClr val="0B7A4A"/>
                 </a:solidFill>
@@ -14915,7 +14915,7 @@
               <a:buNone/>
             </a:pPr>
             <a:r>
-              <a:rPr lang="en-US" sz="1200" dirty="0">
+              <a:rPr lang="en-US" sz="1200" b="1" dirty="0">
                 <a:solidFill>
                   <a:srgbClr val="0B7A4A"/>
                 </a:solidFill>
@@ -15091,7 +15091,7 @@
               <a:buNone/>
             </a:pPr>
             <a:r>
-              <a:rPr lang="en-US" sz="1200" dirty="0">
+              <a:rPr lang="en-US" sz="1200" b="1" dirty="0">
                 <a:solidFill>
                   <a:srgbClr val="0B7A4A"/>
                 </a:solidFill>
@@ -15267,7 +15267,7 @@
               <a:buNone/>
             </a:pPr>
             <a:r>
-              <a:rPr lang="en-US" sz="1200" dirty="0">
+              <a:rPr lang="en-US" sz="1200" b="1" dirty="0">
                 <a:solidFill>
                   <a:srgbClr val="0B7A4A"/>
                 </a:solidFill>
@@ -15443,7 +15443,7 @@
               <a:buNone/>
             </a:pPr>
             <a:r>
-              <a:rPr lang="en-US" sz="1200" dirty="0">
+              <a:rPr lang="en-US" sz="1200" b="1" dirty="0">
                 <a:solidFill>
                   <a:srgbClr val="0B7A4A"/>
                 </a:solidFill>
@@ -15619,7 +15619,7 @@
               <a:buNone/>
             </a:pPr>
             <a:r>
-              <a:rPr lang="en-US" sz="1200" dirty="0">
+              <a:rPr lang="en-US" sz="1200" b="1" dirty="0">
                 <a:solidFill>
                   <a:srgbClr val="0B7A4A"/>
                 </a:solidFill>
@@ -15795,7 +15795,7 @@
               <a:buNone/>
             </a:pPr>
             <a:r>
-              <a:rPr lang="en-US" sz="1200" dirty="0">
+              <a:rPr lang="en-US" sz="1200" b="1" dirty="0">
                 <a:solidFill>
                   <a:srgbClr val="0B7A4A"/>
                 </a:solidFill>
@@ -15971,7 +15971,7 @@
               <a:buNone/>
             </a:pPr>
             <a:r>
-              <a:rPr lang="en-US" sz="1200" dirty="0">
+              <a:rPr lang="en-US" sz="1200" b="1" dirty="0">
                 <a:solidFill>
                   <a:srgbClr val="0B7A4A"/>
                 </a:solidFill>
@@ -16147,7 +16147,7 @@
               <a:buNone/>
             </a:pPr>
             <a:r>
-              <a:rPr lang="en-US" sz="1200" dirty="0">
+              <a:rPr lang="en-US" sz="1200" b="1" dirty="0">
                 <a:solidFill>
                   <a:srgbClr val="0B7A4A"/>
                 </a:solidFill>
@@ -16323,7 +16323,7 @@
               <a:buNone/>
             </a:pPr>
             <a:r>
-              <a:rPr lang="en-US" sz="1200" dirty="0">
+              <a:rPr lang="en-US" sz="1200" b="1" dirty="0">
                 <a:solidFill>
                   <a:srgbClr val="0B7A4A"/>
                 </a:solidFill>
@@ -16499,7 +16499,7 @@
               <a:buNone/>
             </a:pPr>
             <a:r>
-              <a:rPr lang="en-US" sz="1200" dirty="0">
+              <a:rPr lang="en-US" sz="1200" b="1" dirty="0">
                 <a:solidFill>
                   <a:srgbClr val="0B7A4A"/>
                 </a:solidFill>
@@ -16675,7 +16675,7 @@
               <a:buNone/>
             </a:pPr>
             <a:r>
-              <a:rPr lang="en-US" sz="1200" dirty="0">
+              <a:rPr lang="en-US" sz="1200" b="1" dirty="0">
                 <a:solidFill>
                   <a:srgbClr val="0B7A4A"/>
                 </a:solidFill>
@@ -16851,7 +16851,7 @@
               <a:buNone/>
             </a:pPr>
             <a:r>
-              <a:rPr lang="en-US" sz="1200" dirty="0">
+              <a:rPr lang="en-US" sz="1200" b="1" dirty="0">
                 <a:solidFill>
                   <a:srgbClr val="0B7A4A"/>
                 </a:solidFill>
@@ -17027,7 +17027,7 @@
               <a:buNone/>
             </a:pPr>
             <a:r>
-              <a:rPr lang="en-US" sz="1200" dirty="0">
+              <a:rPr lang="en-US" sz="1200" b="1" dirty="0">
                 <a:solidFill>
                   <a:srgbClr val="0B7A4A"/>
                 </a:solidFill>
@@ -17203,7 +17203,7 @@
               <a:buNone/>
             </a:pPr>
             <a:r>
-              <a:rPr lang="en-US" sz="1200" dirty="0">
+              <a:rPr lang="en-US" sz="1200" b="1" dirty="0">
                 <a:solidFill>
                   <a:srgbClr val="0B7A4A"/>
                 </a:solidFill>
@@ -17379,7 +17379,7 @@
               <a:buNone/>
             </a:pPr>
             <a:r>
-              <a:rPr lang="en-US" sz="1200" dirty="0">
+              <a:rPr lang="en-US" sz="1200" b="1" dirty="0">
                 <a:solidFill>
                   <a:srgbClr val="A82B26"/>
                 </a:solidFill>
@@ -17555,7 +17555,7 @@
               <a:buNone/>
             </a:pPr>
             <a:r>
-              <a:rPr lang="en-US" sz="1200" dirty="0">
+              <a:rPr lang="en-US" sz="1200" b="1" dirty="0">
                 <a:solidFill>
                   <a:srgbClr val="A82B26"/>
                 </a:solidFill>
@@ -17731,7 +17731,7 @@
               <a:buNone/>
             </a:pPr>
             <a:r>
-              <a:rPr lang="en-US" sz="1200" dirty="0">
+              <a:rPr lang="en-US" sz="1200" b="1" dirty="0">
                 <a:solidFill>
                   <a:srgbClr val="A82B26"/>
                 </a:solidFill>
@@ -17907,7 +17907,7 @@
               <a:buNone/>
             </a:pPr>
             <a:r>
-              <a:rPr lang="en-US" sz="1200" dirty="0">
+              <a:rPr lang="en-US" sz="1200" b="1" dirty="0">
                 <a:solidFill>
                   <a:srgbClr val="A82B26"/>
                 </a:solidFill>
@@ -18083,7 +18083,7 @@
               <a:buNone/>
             </a:pPr>
             <a:r>
-              <a:rPr lang="en-US" sz="1200" dirty="0">
+              <a:rPr lang="en-US" sz="1200" b="1" dirty="0">
                 <a:solidFill>
                   <a:srgbClr val="A82B26"/>
                 </a:solidFill>
@@ -18259,7 +18259,7 @@
               <a:buNone/>
             </a:pPr>
             <a:r>
-              <a:rPr lang="en-US" sz="1200" dirty="0">
+              <a:rPr lang="en-US" sz="1200" b="1" dirty="0">
                 <a:solidFill>
                   <a:srgbClr val="A82B26"/>
                 </a:solidFill>
@@ -18435,7 +18435,7 @@
               <a:buNone/>
             </a:pPr>
             <a:r>
-              <a:rPr lang="en-US" sz="1200" dirty="0">
+              <a:rPr lang="en-US" sz="1200" b="1" dirty="0">
                 <a:solidFill>
                   <a:srgbClr val="A82B26"/>
                 </a:solidFill>
@@ -18611,7 +18611,7 @@
               <a:buNone/>
             </a:pPr>
             <a:r>
-              <a:rPr lang="en-US" sz="1200" dirty="0">
+              <a:rPr lang="en-US" sz="1200" b="1" dirty="0">
                 <a:solidFill>
                   <a:srgbClr val="A82B26"/>
                 </a:solidFill>
@@ -18787,7 +18787,7 @@
               <a:buNone/>
             </a:pPr>
             <a:r>
-              <a:rPr lang="en-US" sz="1200" dirty="0">
+              <a:rPr lang="en-US" sz="1200" b="1" dirty="0">
                 <a:solidFill>
                   <a:srgbClr val="A82B26"/>
                 </a:solidFill>
@@ -18963,7 +18963,7 @@
               <a:buNone/>
             </a:pPr>
             <a:r>
-              <a:rPr lang="en-US" sz="1200" dirty="0">
+              <a:rPr lang="en-US" sz="1200" b="1" dirty="0">
                 <a:solidFill>
                   <a:srgbClr val="A82B26"/>
                 </a:solidFill>
@@ -19139,7 +19139,7 @@
               <a:buNone/>
             </a:pPr>
             <a:r>
-              <a:rPr lang="en-US" sz="1200" dirty="0">
+              <a:rPr lang="en-US" sz="1200" b="1" dirty="0">
                 <a:solidFill>
                   <a:srgbClr val="A82B26"/>
                 </a:solidFill>
@@ -19315,7 +19315,7 @@
               <a:buNone/>
             </a:pPr>
             <a:r>
-              <a:rPr lang="en-US" sz="1200" dirty="0">
+              <a:rPr lang="en-US" sz="1200" b="1" dirty="0">
                 <a:solidFill>
                   <a:srgbClr val="A82B26"/>
                 </a:solidFill>
@@ -19491,7 +19491,7 @@
               <a:buNone/>
             </a:pPr>
             <a:r>
-              <a:rPr lang="en-US" sz="1200" dirty="0">
+              <a:rPr lang="en-US" sz="1200" b="1" dirty="0">
                 <a:solidFill>
                   <a:srgbClr val="A82B26"/>
                 </a:solidFill>
@@ -19667,7 +19667,7 @@
               <a:buNone/>
             </a:pPr>
             <a:r>
-              <a:rPr lang="en-US" sz="1200" dirty="0">
+              <a:rPr lang="en-US" sz="1200" b="1" dirty="0">
                 <a:solidFill>
                   <a:srgbClr val="A82B26"/>
                 </a:solidFill>
@@ -19843,7 +19843,7 @@
               <a:buNone/>
             </a:pPr>
             <a:r>
-              <a:rPr lang="en-US" sz="1200" dirty="0">
+              <a:rPr lang="en-US" sz="1200" b="1" dirty="0">
                 <a:solidFill>
                   <a:srgbClr val="A82B26"/>
                 </a:solidFill>
@@ -20019,7 +20019,7 @@
               <a:buNone/>
             </a:pPr>
             <a:r>
-              <a:rPr lang="en-US" sz="1200" dirty="0">
+              <a:rPr lang="en-US" sz="1200" b="1" dirty="0">
                 <a:solidFill>
                   <a:srgbClr val="A82B26"/>
                 </a:solidFill>
